--- a/topic02-understanding-class-definitions/unit-1/talk-3/c-class-if-stmts.pptx
+++ b/topic02-understanding-class-definitions/unit-1/talk-3/c-class-if-stmts.pptx
@@ -499,14 +499,14 @@
           </a:ln>
           <a:extLst>
             <a:ext uri="{909E8E84-426E-40dd-AFC4-6F175D3DCCD1}">
-              <a14:hiddenFill xmlns="" xmlns:a14="http://schemas.microsoft.com/office/drawing/2010/main">
+              <a14:hiddenFill xmlns:a14="http://schemas.microsoft.com/office/drawing/2010/main" xmlns="">
                 <a:solidFill>
                   <a:srgbClr val="FFFFFF"/>
                 </a:solidFill>
               </a14:hiddenFill>
             </a:ext>
             <a:ext uri="{FAA26D3D-D897-4be2-8F04-BA451C77F1D7}">
-              <ma14:placeholderFlag xmlns="" xmlns:ma14="http://schemas.microsoft.com/office/mac/drawingml/2011/main" val="1"/>
+              <ma14:placeholderFlag xmlns:ma14="http://schemas.microsoft.com/office/mac/drawingml/2011/main" xmlns="" val="1"/>
             </a:ext>
           </a:extLst>
         </p:spPr>
@@ -850,14 +850,14 @@
           <a:noFill/>
           <a:extLst>
             <a:ext uri="{909E8E84-426E-40dd-AFC4-6F175D3DCCD1}">
-              <a14:hiddenFill xmlns="" xmlns:a14="http://schemas.microsoft.com/office/drawing/2010/main">
+              <a14:hiddenFill xmlns:a14="http://schemas.microsoft.com/office/drawing/2010/main" xmlns="">
                 <a:solidFill>
                   <a:srgbClr val="FFFFFF"/>
                 </a:solidFill>
               </a14:hiddenFill>
             </a:ext>
             <a:ext uri="{91240B29-F687-4f45-9708-019B960494DF}">
-              <a14:hiddenLine xmlns="" xmlns:a14="http://schemas.microsoft.com/office/drawing/2010/main" w="9525">
+              <a14:hiddenLine xmlns:a14="http://schemas.microsoft.com/office/drawing/2010/main" xmlns="" w="9525">
                 <a:solidFill>
                   <a:srgbClr val="000000"/>
                 </a:solidFill>
@@ -1005,14 +1005,14 @@
           <a:noFill/>
           <a:extLst>
             <a:ext uri="{909E8E84-426E-40dd-AFC4-6F175D3DCCD1}">
-              <a14:hiddenFill xmlns="" xmlns:a14="http://schemas.microsoft.com/office/drawing/2010/main">
+              <a14:hiddenFill xmlns:a14="http://schemas.microsoft.com/office/drawing/2010/main" xmlns="">
                 <a:solidFill>
                   <a:srgbClr val="FFFFFF"/>
                 </a:solidFill>
               </a14:hiddenFill>
             </a:ext>
             <a:ext uri="{91240B29-F687-4f45-9708-019B960494DF}">
-              <a14:hiddenLine xmlns="" xmlns:a14="http://schemas.microsoft.com/office/drawing/2010/main" w="9525">
+              <a14:hiddenLine xmlns:a14="http://schemas.microsoft.com/office/drawing/2010/main" xmlns="" w="9525">
                 <a:solidFill>
                   <a:srgbClr val="000000"/>
                 </a:solidFill>
@@ -1160,14 +1160,14 @@
           <a:noFill/>
           <a:extLst>
             <a:ext uri="{909E8E84-426E-40dd-AFC4-6F175D3DCCD1}">
-              <a14:hiddenFill xmlns="" xmlns:a14="http://schemas.microsoft.com/office/drawing/2010/main">
+              <a14:hiddenFill xmlns:a14="http://schemas.microsoft.com/office/drawing/2010/main" xmlns="">
                 <a:solidFill>
                   <a:srgbClr val="FFFFFF"/>
                 </a:solidFill>
               </a14:hiddenFill>
             </a:ext>
             <a:ext uri="{91240B29-F687-4f45-9708-019B960494DF}">
-              <a14:hiddenLine xmlns="" xmlns:a14="http://schemas.microsoft.com/office/drawing/2010/main" w="9525">
+              <a14:hiddenLine xmlns:a14="http://schemas.microsoft.com/office/drawing/2010/main" xmlns="" w="9525">
                 <a:solidFill>
                   <a:srgbClr val="000000"/>
                 </a:solidFill>
@@ -1339,7 +1339,7 @@
         <p:spPr>
           <a:extLst>
             <a:ext uri="{FAA26D3D-D897-4be2-8F04-BA451C77F1D7}">
-              <ma14:placeholderFlag xmlns="" xmlns:ma14="http://schemas.microsoft.com/office/mac/drawingml/2011/main" val="1"/>
+              <ma14:placeholderFlag xmlns:ma14="http://schemas.microsoft.com/office/mac/drawingml/2011/main" xmlns="" val="1"/>
             </a:ext>
           </a:extLst>
         </p:spPr>
@@ -1523,14 +1523,14 @@
           <a:noFill/>
           <a:extLst>
             <a:ext uri="{909E8E84-426E-40dd-AFC4-6F175D3DCCD1}">
-              <a14:hiddenFill xmlns="" xmlns:a14="http://schemas.microsoft.com/office/drawing/2010/main">
+              <a14:hiddenFill xmlns:a14="http://schemas.microsoft.com/office/drawing/2010/main" xmlns="">
                 <a:solidFill>
                   <a:srgbClr val="FFFFFF"/>
                 </a:solidFill>
               </a14:hiddenFill>
             </a:ext>
             <a:ext uri="{91240B29-F687-4f45-9708-019B960494DF}">
-              <a14:hiddenLine xmlns="" xmlns:a14="http://schemas.microsoft.com/office/drawing/2010/main" w="9525">
+              <a14:hiddenLine xmlns:a14="http://schemas.microsoft.com/office/drawing/2010/main" xmlns="" w="9525">
                 <a:solidFill>
                   <a:srgbClr val="000000"/>
                 </a:solidFill>
@@ -1678,14 +1678,14 @@
           <a:noFill/>
           <a:extLst>
             <a:ext uri="{909E8E84-426E-40dd-AFC4-6F175D3DCCD1}">
-              <a14:hiddenFill xmlns="" xmlns:a14="http://schemas.microsoft.com/office/drawing/2010/main">
+              <a14:hiddenFill xmlns:a14="http://schemas.microsoft.com/office/drawing/2010/main" xmlns="">
                 <a:solidFill>
                   <a:srgbClr val="FFFFFF"/>
                 </a:solidFill>
               </a14:hiddenFill>
             </a:ext>
             <a:ext uri="{91240B29-F687-4f45-9708-019B960494DF}">
-              <a14:hiddenLine xmlns="" xmlns:a14="http://schemas.microsoft.com/office/drawing/2010/main" w="9525">
+              <a14:hiddenLine xmlns:a14="http://schemas.microsoft.com/office/drawing/2010/main" xmlns="" w="9525">
                 <a:solidFill>
                   <a:srgbClr val="000000"/>
                 </a:solidFill>
@@ -1833,14 +1833,14 @@
           <a:noFill/>
           <a:extLst>
             <a:ext uri="{909E8E84-426E-40dd-AFC4-6F175D3DCCD1}">
-              <a14:hiddenFill xmlns="" xmlns:a14="http://schemas.microsoft.com/office/drawing/2010/main">
+              <a14:hiddenFill xmlns:a14="http://schemas.microsoft.com/office/drawing/2010/main" xmlns="">
                 <a:solidFill>
                   <a:srgbClr val="FFFFFF"/>
                 </a:solidFill>
               </a14:hiddenFill>
             </a:ext>
             <a:ext uri="{91240B29-F687-4f45-9708-019B960494DF}">
-              <a14:hiddenLine xmlns="" xmlns:a14="http://schemas.microsoft.com/office/drawing/2010/main" w="9525">
+              <a14:hiddenLine xmlns:a14="http://schemas.microsoft.com/office/drawing/2010/main" xmlns="" w="9525">
                 <a:solidFill>
                   <a:srgbClr val="000000"/>
                 </a:solidFill>
@@ -2012,7 +2012,7 @@
         <p:spPr>
           <a:extLst>
             <a:ext uri="{FAA26D3D-D897-4be2-8F04-BA451C77F1D7}">
-              <ma14:placeholderFlag xmlns="" xmlns:ma14="http://schemas.microsoft.com/office/mac/drawingml/2011/main" val="1"/>
+              <ma14:placeholderFlag xmlns:ma14="http://schemas.microsoft.com/office/mac/drawingml/2011/main" xmlns="" val="1"/>
             </a:ext>
           </a:extLst>
         </p:spPr>
@@ -2223,14 +2223,14 @@
           <a:noFill/>
           <a:extLst>
             <a:ext uri="{909E8E84-426E-40dd-AFC4-6F175D3DCCD1}">
-              <a14:hiddenFill xmlns="" xmlns:a14="http://schemas.microsoft.com/office/drawing/2010/main">
+              <a14:hiddenFill xmlns:a14="http://schemas.microsoft.com/office/drawing/2010/main" xmlns="">
                 <a:solidFill>
                   <a:srgbClr val="FFFFFF"/>
                 </a:solidFill>
               </a14:hiddenFill>
             </a:ext>
             <a:ext uri="{91240B29-F687-4f45-9708-019B960494DF}">
-              <a14:hiddenLine xmlns="" xmlns:a14="http://schemas.microsoft.com/office/drawing/2010/main" w="9525">
+              <a14:hiddenLine xmlns:a14="http://schemas.microsoft.com/office/drawing/2010/main" xmlns="" w="9525">
                 <a:solidFill>
                   <a:srgbClr val="000000"/>
                 </a:solidFill>
@@ -2384,14 +2384,14 @@
           <a:noFill/>
           <a:extLst>
             <a:ext uri="{909E8E84-426E-40dd-AFC4-6F175D3DCCD1}">
-              <a14:hiddenFill xmlns="" xmlns:a14="http://schemas.microsoft.com/office/drawing/2010/main">
+              <a14:hiddenFill xmlns:a14="http://schemas.microsoft.com/office/drawing/2010/main" xmlns="">
                 <a:solidFill>
                   <a:srgbClr val="FFFFFF"/>
                 </a:solidFill>
               </a14:hiddenFill>
             </a:ext>
             <a:ext uri="{91240B29-F687-4f45-9708-019B960494DF}">
-              <a14:hiddenLine xmlns="" xmlns:a14="http://schemas.microsoft.com/office/drawing/2010/main" w="9525">
+              <a14:hiddenLine xmlns:a14="http://schemas.microsoft.com/office/drawing/2010/main" xmlns="" w="9525">
                 <a:solidFill>
                   <a:srgbClr val="000000"/>
                 </a:solidFill>
@@ -2545,14 +2545,14 @@
           <a:noFill/>
           <a:extLst>
             <a:ext uri="{909E8E84-426E-40dd-AFC4-6F175D3DCCD1}">
-              <a14:hiddenFill xmlns="" xmlns:a14="http://schemas.microsoft.com/office/drawing/2010/main">
+              <a14:hiddenFill xmlns:a14="http://schemas.microsoft.com/office/drawing/2010/main" xmlns="">
                 <a:solidFill>
                   <a:srgbClr val="FFFFFF"/>
                 </a:solidFill>
               </a14:hiddenFill>
             </a:ext>
             <a:ext uri="{91240B29-F687-4f45-9708-019B960494DF}">
-              <a14:hiddenLine xmlns="" xmlns:a14="http://schemas.microsoft.com/office/drawing/2010/main" w="9525">
+              <a14:hiddenLine xmlns:a14="http://schemas.microsoft.com/office/drawing/2010/main" xmlns="" w="9525">
                 <a:solidFill>
                   <a:srgbClr val="000000"/>
                 </a:solidFill>
@@ -2736,7 +2736,7 @@
         <p:spPr>
           <a:extLst>
             <a:ext uri="{FAA26D3D-D897-4be2-8F04-BA451C77F1D7}">
-              <ma14:placeholderFlag xmlns="" xmlns:ma14="http://schemas.microsoft.com/office/mac/drawingml/2011/main" val="1"/>
+              <ma14:placeholderFlag xmlns:ma14="http://schemas.microsoft.com/office/mac/drawingml/2011/main" xmlns="" val="1"/>
             </a:ext>
           </a:extLst>
         </p:spPr>
@@ -2935,14 +2935,14 @@
           <a:noFill/>
           <a:extLst>
             <a:ext uri="{909E8E84-426E-40dd-AFC4-6F175D3DCCD1}">
-              <a14:hiddenFill xmlns="" xmlns:a14="http://schemas.microsoft.com/office/drawing/2010/main">
+              <a14:hiddenFill xmlns:a14="http://schemas.microsoft.com/office/drawing/2010/main" xmlns="">
                 <a:solidFill>
                   <a:srgbClr val="FFFFFF"/>
                 </a:solidFill>
               </a14:hiddenFill>
             </a:ext>
             <a:ext uri="{91240B29-F687-4f45-9708-019B960494DF}">
-              <a14:hiddenLine xmlns="" xmlns:a14="http://schemas.microsoft.com/office/drawing/2010/main" w="9525">
+              <a14:hiddenLine xmlns:a14="http://schemas.microsoft.com/office/drawing/2010/main" xmlns="" w="9525">
                 <a:solidFill>
                   <a:srgbClr val="000000"/>
                 </a:solidFill>
@@ -3090,14 +3090,14 @@
           <a:noFill/>
           <a:extLst>
             <a:ext uri="{909E8E84-426E-40dd-AFC4-6F175D3DCCD1}">
-              <a14:hiddenFill xmlns="" xmlns:a14="http://schemas.microsoft.com/office/drawing/2010/main">
+              <a14:hiddenFill xmlns:a14="http://schemas.microsoft.com/office/drawing/2010/main" xmlns="">
                 <a:solidFill>
                   <a:srgbClr val="FFFFFF"/>
                 </a:solidFill>
               </a14:hiddenFill>
             </a:ext>
             <a:ext uri="{91240B29-F687-4f45-9708-019B960494DF}">
-              <a14:hiddenLine xmlns="" xmlns:a14="http://schemas.microsoft.com/office/drawing/2010/main" w="9525">
+              <a14:hiddenLine xmlns:a14="http://schemas.microsoft.com/office/drawing/2010/main" xmlns="" w="9525">
                 <a:solidFill>
                   <a:srgbClr val="000000"/>
                 </a:solidFill>
@@ -3245,14 +3245,14 @@
           <a:noFill/>
           <a:extLst>
             <a:ext uri="{909E8E84-426E-40dd-AFC4-6F175D3DCCD1}">
-              <a14:hiddenFill xmlns="" xmlns:a14="http://schemas.microsoft.com/office/drawing/2010/main">
+              <a14:hiddenFill xmlns:a14="http://schemas.microsoft.com/office/drawing/2010/main" xmlns="">
                 <a:solidFill>
                   <a:srgbClr val="FFFFFF"/>
                 </a:solidFill>
               </a14:hiddenFill>
             </a:ext>
             <a:ext uri="{91240B29-F687-4f45-9708-019B960494DF}">
-              <a14:hiddenLine xmlns="" xmlns:a14="http://schemas.microsoft.com/office/drawing/2010/main" w="9525">
+              <a14:hiddenLine xmlns:a14="http://schemas.microsoft.com/office/drawing/2010/main" xmlns="" w="9525">
                 <a:solidFill>
                   <a:srgbClr val="000000"/>
                 </a:solidFill>
@@ -3424,7 +3424,7 @@
         <p:spPr>
           <a:extLst>
             <a:ext uri="{FAA26D3D-D897-4be2-8F04-BA451C77F1D7}">
-              <ma14:placeholderFlag xmlns="" xmlns:ma14="http://schemas.microsoft.com/office/mac/drawingml/2011/main" val="1"/>
+              <ma14:placeholderFlag xmlns:ma14="http://schemas.microsoft.com/office/mac/drawingml/2011/main" xmlns="" val="1"/>
             </a:ext>
           </a:extLst>
         </p:spPr>
@@ -3646,14 +3646,14 @@
           <a:noFill/>
           <a:extLst>
             <a:ext uri="{909E8E84-426E-40dd-AFC4-6F175D3DCCD1}">
-              <a14:hiddenFill xmlns="" xmlns:a14="http://schemas.microsoft.com/office/drawing/2010/main">
+              <a14:hiddenFill xmlns:a14="http://schemas.microsoft.com/office/drawing/2010/main" xmlns="">
                 <a:solidFill>
                   <a:srgbClr val="FFFFFF"/>
                 </a:solidFill>
               </a14:hiddenFill>
             </a:ext>
             <a:ext uri="{91240B29-F687-4f45-9708-019B960494DF}">
-              <a14:hiddenLine xmlns="" xmlns:a14="http://schemas.microsoft.com/office/drawing/2010/main" w="9525">
+              <a14:hiddenLine xmlns:a14="http://schemas.microsoft.com/office/drawing/2010/main" xmlns="" w="9525">
                 <a:solidFill>
                   <a:srgbClr val="000000"/>
                 </a:solidFill>
@@ -3807,14 +3807,14 @@
           <a:noFill/>
           <a:extLst>
             <a:ext uri="{909E8E84-426E-40dd-AFC4-6F175D3DCCD1}">
-              <a14:hiddenFill xmlns="" xmlns:a14="http://schemas.microsoft.com/office/drawing/2010/main">
+              <a14:hiddenFill xmlns:a14="http://schemas.microsoft.com/office/drawing/2010/main" xmlns="">
                 <a:solidFill>
                   <a:srgbClr val="FFFFFF"/>
                 </a:solidFill>
               </a14:hiddenFill>
             </a:ext>
             <a:ext uri="{91240B29-F687-4f45-9708-019B960494DF}">
-              <a14:hiddenLine xmlns="" xmlns:a14="http://schemas.microsoft.com/office/drawing/2010/main" w="9525">
+              <a14:hiddenLine xmlns:a14="http://schemas.microsoft.com/office/drawing/2010/main" xmlns="" w="9525">
                 <a:solidFill>
                   <a:srgbClr val="000000"/>
                 </a:solidFill>
@@ -3968,14 +3968,14 @@
           <a:noFill/>
           <a:extLst>
             <a:ext uri="{909E8E84-426E-40dd-AFC4-6F175D3DCCD1}">
-              <a14:hiddenFill xmlns="" xmlns:a14="http://schemas.microsoft.com/office/drawing/2010/main">
+              <a14:hiddenFill xmlns:a14="http://schemas.microsoft.com/office/drawing/2010/main" xmlns="">
                 <a:solidFill>
                   <a:srgbClr val="FFFFFF"/>
                 </a:solidFill>
               </a14:hiddenFill>
             </a:ext>
             <a:ext uri="{91240B29-F687-4f45-9708-019B960494DF}">
-              <a14:hiddenLine xmlns="" xmlns:a14="http://schemas.microsoft.com/office/drawing/2010/main" w="9525">
+              <a14:hiddenLine xmlns:a14="http://schemas.microsoft.com/office/drawing/2010/main" xmlns="" w="9525">
                 <a:solidFill>
                   <a:srgbClr val="000000"/>
                 </a:solidFill>
@@ -4159,7 +4159,7 @@
         <p:spPr>
           <a:extLst>
             <a:ext uri="{FAA26D3D-D897-4be2-8F04-BA451C77F1D7}">
-              <ma14:placeholderFlag xmlns="" xmlns:ma14="http://schemas.microsoft.com/office/mac/drawingml/2011/main" val="1"/>
+              <ma14:placeholderFlag xmlns:ma14="http://schemas.microsoft.com/office/mac/drawingml/2011/main" xmlns="" val="1"/>
             </a:ext>
           </a:extLst>
         </p:spPr>
@@ -8339,22 +8339,16 @@
           </a:bodyPr>
           <a:lstStyle/>
           <a:p>
-            <a:pPr eaLnBrk="1" hangingPunct="1">
+            <a:pPr>
               <a:defRPr/>
             </a:pPr>
             <a:r>
-              <a:rPr lang="en-GB" dirty="0">
-                <a:ea typeface="+mj-ea"/>
-                <a:cs typeface="+mj-cs"/>
-              </a:rPr>
-              <a:t>Selection – if </a:t>
-            </a:r>
-            <a:r>
-              <a:rPr lang="en-GB" dirty="0" err="1">
-                <a:ea typeface="+mj-ea"/>
-                <a:cs typeface="+mj-cs"/>
-              </a:rPr>
-              <a:t>statemenrs</a:t>
+              <a:rPr lang="en-GB" dirty="0"/>
+              <a:t>Understanding </a:t>
+            </a:r>
+            <a:r>
+              <a:rPr lang="en-GB"/>
+              <a:t>class definitions 3</a:t>
             </a:r>
             <a:endParaRPr lang="en-GB" dirty="0">
               <a:ea typeface="+mj-ea"/>
@@ -8375,24 +8369,25 @@
         </p:nvSpPr>
         <p:spPr>
           <a:xfrm>
-            <a:off x="98936" y="1418712"/>
-            <a:ext cx="10134430" cy="846384"/>
+            <a:off x="98936" y="1580294"/>
+            <a:ext cx="10134430" cy="523220"/>
           </a:xfrm>
         </p:spPr>
         <p:txBody>
           <a:bodyPr/>
           <a:lstStyle/>
           <a:p>
-            <a:pPr eaLnBrk="1" hangingPunct="1">
+            <a:pPr>
               <a:defRPr/>
             </a:pPr>
             <a:r>
-              <a:rPr lang="en-GB" dirty="0">
-                <a:ea typeface="+mn-ea"/>
-                <a:cs typeface="+mn-cs"/>
-              </a:rPr>
-              <a:t>Exploring source code</a:t>
-            </a:r>
+              <a:rPr lang="en-GB" sz="2800" dirty="0"/>
+              <a:t>Selection – if statements</a:t>
+            </a:r>
+            <a:endParaRPr lang="en-GB" sz="2800" dirty="0">
+              <a:ea typeface="+mn-ea"/>
+              <a:cs typeface="+mn-cs"/>
+            </a:endParaRPr>
           </a:p>
         </p:txBody>
       </p:sp>
@@ -8418,14 +8413,14 @@
           </a:ln>
           <a:extLst>
             <a:ext uri="{909E8E84-426E-40dd-AFC4-6F175D3DCCD1}">
-              <a14:hiddenFill xmlns="" xmlns:a14="http://schemas.microsoft.com/office/drawing/2010/main">
+              <a14:hiddenFill xmlns:a14="http://schemas.microsoft.com/office/drawing/2010/main" xmlns="">
                 <a:solidFill>
                   <a:srgbClr val="FFFFFF"/>
                 </a:solidFill>
               </a14:hiddenFill>
             </a:ext>
             <a:ext uri="{91240B29-F687-4f45-9708-019B960494DF}">
-              <a14:hiddenLine xmlns="" xmlns:a14="http://schemas.microsoft.com/office/drawing/2010/main" w="9525">
+              <a14:hiddenLine xmlns:a14="http://schemas.microsoft.com/office/drawing/2010/main" xmlns="" w="9525">
                 <a:solidFill>
                   <a:srgbClr val="000000"/>
                 </a:solidFill>
@@ -9075,14 +9070,14 @@
           </a:ln>
           <a:extLst>
             <a:ext uri="{909E8E84-426E-40dd-AFC4-6F175D3DCCD1}">
-              <a14:hiddenFill xmlns="" xmlns:a14="http://schemas.microsoft.com/office/drawing/2010/main">
+              <a14:hiddenFill xmlns:a14="http://schemas.microsoft.com/office/drawing/2010/main" xmlns="">
                 <a:solidFill>
                   <a:srgbClr val="FFFFFF"/>
                 </a:solidFill>
               </a14:hiddenFill>
             </a:ext>
             <a:ext uri="{91240B29-F687-4f45-9708-019B960494DF}">
-              <a14:hiddenLine xmlns="" xmlns:a14="http://schemas.microsoft.com/office/drawing/2010/main" w="9525">
+              <a14:hiddenLine xmlns:a14="http://schemas.microsoft.com/office/drawing/2010/main" xmlns="" w="9525">
                 <a:solidFill>
                   <a:srgbClr val="000000"/>
                 </a:solidFill>
@@ -11147,14 +11142,14 @@
           </a:ln>
           <a:extLst>
             <a:ext uri="{909E8E84-426E-40dd-AFC4-6F175D3DCCD1}">
-              <a14:hiddenFill xmlns="" xmlns:a14="http://schemas.microsoft.com/office/drawing/2010/main">
+              <a14:hiddenFill xmlns:a14="http://schemas.microsoft.com/office/drawing/2010/main" xmlns="">
                 <a:solidFill>
                   <a:srgbClr val="FFFFFF"/>
                 </a:solidFill>
               </a14:hiddenFill>
             </a:ext>
             <a:ext uri="{91240B29-F687-4f45-9708-019B960494DF}">
-              <a14:hiddenLine xmlns="" xmlns:a14="http://schemas.microsoft.com/office/drawing/2010/main" w="9525">
+              <a14:hiddenLine xmlns:a14="http://schemas.microsoft.com/office/drawing/2010/main" xmlns="" w="9525">
                 <a:solidFill>
                   <a:srgbClr val="000000"/>
                 </a:solidFill>
@@ -15439,14 +15434,14 @@
           </a:ln>
           <a:extLst>
             <a:ext uri="{909E8E84-426E-40dd-AFC4-6F175D3DCCD1}">
-              <a14:hiddenFill xmlns="" xmlns:a14="http://schemas.microsoft.com/office/drawing/2010/main">
+              <a14:hiddenFill xmlns:a14="http://schemas.microsoft.com/office/drawing/2010/main" xmlns="">
                 <a:solidFill>
                   <a:srgbClr val="FFFFFF"/>
                 </a:solidFill>
               </a14:hiddenFill>
             </a:ext>
             <a:ext uri="{91240B29-F687-4f45-9708-019B960494DF}">
-              <a14:hiddenLine xmlns="" xmlns:a14="http://schemas.microsoft.com/office/drawing/2010/main" w="9525">
+              <a14:hiddenLine xmlns:a14="http://schemas.microsoft.com/office/drawing/2010/main" xmlns="" w="9525">
                 <a:solidFill>
                   <a:srgbClr val="000000"/>
                 </a:solidFill>

--- a/topic02-understanding-class-definitions/unit-1/talk-3/c-class-if-stmts.pptx
+++ b/topic02-understanding-class-definitions/unit-1/talk-3/c-class-if-stmts.pptx
@@ -499,14 +499,14 @@
           </a:ln>
           <a:extLst>
             <a:ext uri="{909E8E84-426E-40dd-AFC4-6F175D3DCCD1}">
-              <a14:hiddenFill xmlns:a14="http://schemas.microsoft.com/office/drawing/2010/main" xmlns="">
+              <a14:hiddenFill xmlns="" xmlns:a14="http://schemas.microsoft.com/office/drawing/2010/main">
                 <a:solidFill>
                   <a:srgbClr val="FFFFFF"/>
                 </a:solidFill>
               </a14:hiddenFill>
             </a:ext>
             <a:ext uri="{FAA26D3D-D897-4be2-8F04-BA451C77F1D7}">
-              <ma14:placeholderFlag xmlns:ma14="http://schemas.microsoft.com/office/mac/drawingml/2011/main" xmlns="" val="1"/>
+              <ma14:placeholderFlag xmlns="" xmlns:ma14="http://schemas.microsoft.com/office/mac/drawingml/2011/main" val="1"/>
             </a:ext>
           </a:extLst>
         </p:spPr>
@@ -850,14 +850,14 @@
           <a:noFill/>
           <a:extLst>
             <a:ext uri="{909E8E84-426E-40dd-AFC4-6F175D3DCCD1}">
-              <a14:hiddenFill xmlns:a14="http://schemas.microsoft.com/office/drawing/2010/main" xmlns="">
+              <a14:hiddenFill xmlns="" xmlns:a14="http://schemas.microsoft.com/office/drawing/2010/main">
                 <a:solidFill>
                   <a:srgbClr val="FFFFFF"/>
                 </a:solidFill>
               </a14:hiddenFill>
             </a:ext>
             <a:ext uri="{91240B29-F687-4f45-9708-019B960494DF}">
-              <a14:hiddenLine xmlns:a14="http://schemas.microsoft.com/office/drawing/2010/main" xmlns="" w="9525">
+              <a14:hiddenLine xmlns="" xmlns:a14="http://schemas.microsoft.com/office/drawing/2010/main" w="9525">
                 <a:solidFill>
                   <a:srgbClr val="000000"/>
                 </a:solidFill>
@@ -1005,14 +1005,14 @@
           <a:noFill/>
           <a:extLst>
             <a:ext uri="{909E8E84-426E-40dd-AFC4-6F175D3DCCD1}">
-              <a14:hiddenFill xmlns:a14="http://schemas.microsoft.com/office/drawing/2010/main" xmlns="">
+              <a14:hiddenFill xmlns="" xmlns:a14="http://schemas.microsoft.com/office/drawing/2010/main">
                 <a:solidFill>
                   <a:srgbClr val="FFFFFF"/>
                 </a:solidFill>
               </a14:hiddenFill>
             </a:ext>
             <a:ext uri="{91240B29-F687-4f45-9708-019B960494DF}">
-              <a14:hiddenLine xmlns:a14="http://schemas.microsoft.com/office/drawing/2010/main" xmlns="" w="9525">
+              <a14:hiddenLine xmlns="" xmlns:a14="http://schemas.microsoft.com/office/drawing/2010/main" w="9525">
                 <a:solidFill>
                   <a:srgbClr val="000000"/>
                 </a:solidFill>
@@ -1160,14 +1160,14 @@
           <a:noFill/>
           <a:extLst>
             <a:ext uri="{909E8E84-426E-40dd-AFC4-6F175D3DCCD1}">
-              <a14:hiddenFill xmlns:a14="http://schemas.microsoft.com/office/drawing/2010/main" xmlns="">
+              <a14:hiddenFill xmlns="" xmlns:a14="http://schemas.microsoft.com/office/drawing/2010/main">
                 <a:solidFill>
                   <a:srgbClr val="FFFFFF"/>
                 </a:solidFill>
               </a14:hiddenFill>
             </a:ext>
             <a:ext uri="{91240B29-F687-4f45-9708-019B960494DF}">
-              <a14:hiddenLine xmlns:a14="http://schemas.microsoft.com/office/drawing/2010/main" xmlns="" w="9525">
+              <a14:hiddenLine xmlns="" xmlns:a14="http://schemas.microsoft.com/office/drawing/2010/main" w="9525">
                 <a:solidFill>
                   <a:srgbClr val="000000"/>
                 </a:solidFill>
@@ -1339,7 +1339,7 @@
         <p:spPr>
           <a:extLst>
             <a:ext uri="{FAA26D3D-D897-4be2-8F04-BA451C77F1D7}">
-              <ma14:placeholderFlag xmlns:ma14="http://schemas.microsoft.com/office/mac/drawingml/2011/main" xmlns="" val="1"/>
+              <ma14:placeholderFlag xmlns="" xmlns:ma14="http://schemas.microsoft.com/office/mac/drawingml/2011/main" val="1"/>
             </a:ext>
           </a:extLst>
         </p:spPr>
@@ -1523,14 +1523,14 @@
           <a:noFill/>
           <a:extLst>
             <a:ext uri="{909E8E84-426E-40dd-AFC4-6F175D3DCCD1}">
-              <a14:hiddenFill xmlns:a14="http://schemas.microsoft.com/office/drawing/2010/main" xmlns="">
+              <a14:hiddenFill xmlns="" xmlns:a14="http://schemas.microsoft.com/office/drawing/2010/main">
                 <a:solidFill>
                   <a:srgbClr val="FFFFFF"/>
                 </a:solidFill>
               </a14:hiddenFill>
             </a:ext>
             <a:ext uri="{91240B29-F687-4f45-9708-019B960494DF}">
-              <a14:hiddenLine xmlns:a14="http://schemas.microsoft.com/office/drawing/2010/main" xmlns="" w="9525">
+              <a14:hiddenLine xmlns="" xmlns:a14="http://schemas.microsoft.com/office/drawing/2010/main" w="9525">
                 <a:solidFill>
                   <a:srgbClr val="000000"/>
                 </a:solidFill>
@@ -1678,14 +1678,14 @@
           <a:noFill/>
           <a:extLst>
             <a:ext uri="{909E8E84-426E-40dd-AFC4-6F175D3DCCD1}">
-              <a14:hiddenFill xmlns:a14="http://schemas.microsoft.com/office/drawing/2010/main" xmlns="">
+              <a14:hiddenFill xmlns="" xmlns:a14="http://schemas.microsoft.com/office/drawing/2010/main">
                 <a:solidFill>
                   <a:srgbClr val="FFFFFF"/>
                 </a:solidFill>
               </a14:hiddenFill>
             </a:ext>
             <a:ext uri="{91240B29-F687-4f45-9708-019B960494DF}">
-              <a14:hiddenLine xmlns:a14="http://schemas.microsoft.com/office/drawing/2010/main" xmlns="" w="9525">
+              <a14:hiddenLine xmlns="" xmlns:a14="http://schemas.microsoft.com/office/drawing/2010/main" w="9525">
                 <a:solidFill>
                   <a:srgbClr val="000000"/>
                 </a:solidFill>
@@ -1833,14 +1833,14 @@
           <a:noFill/>
           <a:extLst>
             <a:ext uri="{909E8E84-426E-40dd-AFC4-6F175D3DCCD1}">
-              <a14:hiddenFill xmlns:a14="http://schemas.microsoft.com/office/drawing/2010/main" xmlns="">
+              <a14:hiddenFill xmlns="" xmlns:a14="http://schemas.microsoft.com/office/drawing/2010/main">
                 <a:solidFill>
                   <a:srgbClr val="FFFFFF"/>
                 </a:solidFill>
               </a14:hiddenFill>
             </a:ext>
             <a:ext uri="{91240B29-F687-4f45-9708-019B960494DF}">
-              <a14:hiddenLine xmlns:a14="http://schemas.microsoft.com/office/drawing/2010/main" xmlns="" w="9525">
+              <a14:hiddenLine xmlns="" xmlns:a14="http://schemas.microsoft.com/office/drawing/2010/main" w="9525">
                 <a:solidFill>
                   <a:srgbClr val="000000"/>
                 </a:solidFill>
@@ -2012,7 +2012,7 @@
         <p:spPr>
           <a:extLst>
             <a:ext uri="{FAA26D3D-D897-4be2-8F04-BA451C77F1D7}">
-              <ma14:placeholderFlag xmlns:ma14="http://schemas.microsoft.com/office/mac/drawingml/2011/main" xmlns="" val="1"/>
+              <ma14:placeholderFlag xmlns="" xmlns:ma14="http://schemas.microsoft.com/office/mac/drawingml/2011/main" val="1"/>
             </a:ext>
           </a:extLst>
         </p:spPr>
@@ -2223,14 +2223,14 @@
           <a:noFill/>
           <a:extLst>
             <a:ext uri="{909E8E84-426E-40dd-AFC4-6F175D3DCCD1}">
-              <a14:hiddenFill xmlns:a14="http://schemas.microsoft.com/office/drawing/2010/main" xmlns="">
+              <a14:hiddenFill xmlns="" xmlns:a14="http://schemas.microsoft.com/office/drawing/2010/main">
                 <a:solidFill>
                   <a:srgbClr val="FFFFFF"/>
                 </a:solidFill>
               </a14:hiddenFill>
             </a:ext>
             <a:ext uri="{91240B29-F687-4f45-9708-019B960494DF}">
-              <a14:hiddenLine xmlns:a14="http://schemas.microsoft.com/office/drawing/2010/main" xmlns="" w="9525">
+              <a14:hiddenLine xmlns="" xmlns:a14="http://schemas.microsoft.com/office/drawing/2010/main" w="9525">
                 <a:solidFill>
                   <a:srgbClr val="000000"/>
                 </a:solidFill>
@@ -2384,14 +2384,14 @@
           <a:noFill/>
           <a:extLst>
             <a:ext uri="{909E8E84-426E-40dd-AFC4-6F175D3DCCD1}">
-              <a14:hiddenFill xmlns:a14="http://schemas.microsoft.com/office/drawing/2010/main" xmlns="">
+              <a14:hiddenFill xmlns="" xmlns:a14="http://schemas.microsoft.com/office/drawing/2010/main">
                 <a:solidFill>
                   <a:srgbClr val="FFFFFF"/>
                 </a:solidFill>
               </a14:hiddenFill>
             </a:ext>
             <a:ext uri="{91240B29-F687-4f45-9708-019B960494DF}">
-              <a14:hiddenLine xmlns:a14="http://schemas.microsoft.com/office/drawing/2010/main" xmlns="" w="9525">
+              <a14:hiddenLine xmlns="" xmlns:a14="http://schemas.microsoft.com/office/drawing/2010/main" w="9525">
                 <a:solidFill>
                   <a:srgbClr val="000000"/>
                 </a:solidFill>
@@ -2545,14 +2545,14 @@
           <a:noFill/>
           <a:extLst>
             <a:ext uri="{909E8E84-426E-40dd-AFC4-6F175D3DCCD1}">
-              <a14:hiddenFill xmlns:a14="http://schemas.microsoft.com/office/drawing/2010/main" xmlns="">
+              <a14:hiddenFill xmlns="" xmlns:a14="http://schemas.microsoft.com/office/drawing/2010/main">
                 <a:solidFill>
                   <a:srgbClr val="FFFFFF"/>
                 </a:solidFill>
               </a14:hiddenFill>
             </a:ext>
             <a:ext uri="{91240B29-F687-4f45-9708-019B960494DF}">
-              <a14:hiddenLine xmlns:a14="http://schemas.microsoft.com/office/drawing/2010/main" xmlns="" w="9525">
+              <a14:hiddenLine xmlns="" xmlns:a14="http://schemas.microsoft.com/office/drawing/2010/main" w="9525">
                 <a:solidFill>
                   <a:srgbClr val="000000"/>
                 </a:solidFill>
@@ -2736,7 +2736,7 @@
         <p:spPr>
           <a:extLst>
             <a:ext uri="{FAA26D3D-D897-4be2-8F04-BA451C77F1D7}">
-              <ma14:placeholderFlag xmlns:ma14="http://schemas.microsoft.com/office/mac/drawingml/2011/main" xmlns="" val="1"/>
+              <ma14:placeholderFlag xmlns="" xmlns:ma14="http://schemas.microsoft.com/office/mac/drawingml/2011/main" val="1"/>
             </a:ext>
           </a:extLst>
         </p:spPr>
@@ -2935,14 +2935,14 @@
           <a:noFill/>
           <a:extLst>
             <a:ext uri="{909E8E84-426E-40dd-AFC4-6F175D3DCCD1}">
-              <a14:hiddenFill xmlns:a14="http://schemas.microsoft.com/office/drawing/2010/main" xmlns="">
+              <a14:hiddenFill xmlns="" xmlns:a14="http://schemas.microsoft.com/office/drawing/2010/main">
                 <a:solidFill>
                   <a:srgbClr val="FFFFFF"/>
                 </a:solidFill>
               </a14:hiddenFill>
             </a:ext>
             <a:ext uri="{91240B29-F687-4f45-9708-019B960494DF}">
-              <a14:hiddenLine xmlns:a14="http://schemas.microsoft.com/office/drawing/2010/main" xmlns="" w="9525">
+              <a14:hiddenLine xmlns="" xmlns:a14="http://schemas.microsoft.com/office/drawing/2010/main" w="9525">
                 <a:solidFill>
                   <a:srgbClr val="000000"/>
                 </a:solidFill>
@@ -3090,14 +3090,14 @@
           <a:noFill/>
           <a:extLst>
             <a:ext uri="{909E8E84-426E-40dd-AFC4-6F175D3DCCD1}">
-              <a14:hiddenFill xmlns:a14="http://schemas.microsoft.com/office/drawing/2010/main" xmlns="">
+              <a14:hiddenFill xmlns="" xmlns:a14="http://schemas.microsoft.com/office/drawing/2010/main">
                 <a:solidFill>
                   <a:srgbClr val="FFFFFF"/>
                 </a:solidFill>
               </a14:hiddenFill>
             </a:ext>
             <a:ext uri="{91240B29-F687-4f45-9708-019B960494DF}">
-              <a14:hiddenLine xmlns:a14="http://schemas.microsoft.com/office/drawing/2010/main" xmlns="" w="9525">
+              <a14:hiddenLine xmlns="" xmlns:a14="http://schemas.microsoft.com/office/drawing/2010/main" w="9525">
                 <a:solidFill>
                   <a:srgbClr val="000000"/>
                 </a:solidFill>
@@ -3245,14 +3245,14 @@
           <a:noFill/>
           <a:extLst>
             <a:ext uri="{909E8E84-426E-40dd-AFC4-6F175D3DCCD1}">
-              <a14:hiddenFill xmlns:a14="http://schemas.microsoft.com/office/drawing/2010/main" xmlns="">
+              <a14:hiddenFill xmlns="" xmlns:a14="http://schemas.microsoft.com/office/drawing/2010/main">
                 <a:solidFill>
                   <a:srgbClr val="FFFFFF"/>
                 </a:solidFill>
               </a14:hiddenFill>
             </a:ext>
             <a:ext uri="{91240B29-F687-4f45-9708-019B960494DF}">
-              <a14:hiddenLine xmlns:a14="http://schemas.microsoft.com/office/drawing/2010/main" xmlns="" w="9525">
+              <a14:hiddenLine xmlns="" xmlns:a14="http://schemas.microsoft.com/office/drawing/2010/main" w="9525">
                 <a:solidFill>
                   <a:srgbClr val="000000"/>
                 </a:solidFill>
@@ -3424,7 +3424,7 @@
         <p:spPr>
           <a:extLst>
             <a:ext uri="{FAA26D3D-D897-4be2-8F04-BA451C77F1D7}">
-              <ma14:placeholderFlag xmlns:ma14="http://schemas.microsoft.com/office/mac/drawingml/2011/main" xmlns="" val="1"/>
+              <ma14:placeholderFlag xmlns="" xmlns:ma14="http://schemas.microsoft.com/office/mac/drawingml/2011/main" val="1"/>
             </a:ext>
           </a:extLst>
         </p:spPr>
@@ -3646,14 +3646,14 @@
           <a:noFill/>
           <a:extLst>
             <a:ext uri="{909E8E84-426E-40dd-AFC4-6F175D3DCCD1}">
-              <a14:hiddenFill xmlns:a14="http://schemas.microsoft.com/office/drawing/2010/main" xmlns="">
+              <a14:hiddenFill xmlns="" xmlns:a14="http://schemas.microsoft.com/office/drawing/2010/main">
                 <a:solidFill>
                   <a:srgbClr val="FFFFFF"/>
                 </a:solidFill>
               </a14:hiddenFill>
             </a:ext>
             <a:ext uri="{91240B29-F687-4f45-9708-019B960494DF}">
-              <a14:hiddenLine xmlns:a14="http://schemas.microsoft.com/office/drawing/2010/main" xmlns="" w="9525">
+              <a14:hiddenLine xmlns="" xmlns:a14="http://schemas.microsoft.com/office/drawing/2010/main" w="9525">
                 <a:solidFill>
                   <a:srgbClr val="000000"/>
                 </a:solidFill>
@@ -3807,14 +3807,14 @@
           <a:noFill/>
           <a:extLst>
             <a:ext uri="{909E8E84-426E-40dd-AFC4-6F175D3DCCD1}">
-              <a14:hiddenFill xmlns:a14="http://schemas.microsoft.com/office/drawing/2010/main" xmlns="">
+              <a14:hiddenFill xmlns="" xmlns:a14="http://schemas.microsoft.com/office/drawing/2010/main">
                 <a:solidFill>
                   <a:srgbClr val="FFFFFF"/>
                 </a:solidFill>
               </a14:hiddenFill>
             </a:ext>
             <a:ext uri="{91240B29-F687-4f45-9708-019B960494DF}">
-              <a14:hiddenLine xmlns:a14="http://schemas.microsoft.com/office/drawing/2010/main" xmlns="" w="9525">
+              <a14:hiddenLine xmlns="" xmlns:a14="http://schemas.microsoft.com/office/drawing/2010/main" w="9525">
                 <a:solidFill>
                   <a:srgbClr val="000000"/>
                 </a:solidFill>
@@ -3968,14 +3968,14 @@
           <a:noFill/>
           <a:extLst>
             <a:ext uri="{909E8E84-426E-40dd-AFC4-6F175D3DCCD1}">
-              <a14:hiddenFill xmlns:a14="http://schemas.microsoft.com/office/drawing/2010/main" xmlns="">
+              <a14:hiddenFill xmlns="" xmlns:a14="http://schemas.microsoft.com/office/drawing/2010/main">
                 <a:solidFill>
                   <a:srgbClr val="FFFFFF"/>
                 </a:solidFill>
               </a14:hiddenFill>
             </a:ext>
             <a:ext uri="{91240B29-F687-4f45-9708-019B960494DF}">
-              <a14:hiddenLine xmlns:a14="http://schemas.microsoft.com/office/drawing/2010/main" xmlns="" w="9525">
+              <a14:hiddenLine xmlns="" xmlns:a14="http://schemas.microsoft.com/office/drawing/2010/main" w="9525">
                 <a:solidFill>
                   <a:srgbClr val="000000"/>
                 </a:solidFill>
@@ -4159,7 +4159,7 @@
         <p:spPr>
           <a:extLst>
             <a:ext uri="{FAA26D3D-D897-4be2-8F04-BA451C77F1D7}">
-              <ma14:placeholderFlag xmlns:ma14="http://schemas.microsoft.com/office/mac/drawingml/2011/main" xmlns="" val="1"/>
+              <ma14:placeholderFlag xmlns="" xmlns:ma14="http://schemas.microsoft.com/office/mac/drawingml/2011/main" val="1"/>
             </a:ext>
           </a:extLst>
         </p:spPr>
@@ -4463,7 +4463,7 @@
           <a:p>
             <a:fld id="{C764DE79-268F-4C1A-8933-263129D2AF90}" type="datetimeFigureOut">
               <a:rPr lang="en-US" smtClean="0"/>
-              <a:t>9/20/25</a:t>
+              <a:t>10/16/25</a:t>
             </a:fld>
             <a:endParaRPr lang="en-US"/>
           </a:p>
@@ -4634,7 +4634,7 @@
           <a:p>
             <a:fld id="{C764DE79-268F-4C1A-8933-263129D2AF90}" type="datetimeFigureOut">
               <a:rPr lang="en-US" smtClean="0"/>
-              <a:t>9/20/25</a:t>
+              <a:t>10/16/25</a:t>
             </a:fld>
             <a:endParaRPr lang="en-US"/>
           </a:p>
@@ -4815,7 +4815,7 @@
           <a:p>
             <a:fld id="{C764DE79-268F-4C1A-8933-263129D2AF90}" type="datetimeFigureOut">
               <a:rPr lang="en-US" smtClean="0"/>
-              <a:t>9/20/25</a:t>
+              <a:t>10/16/25</a:t>
             </a:fld>
             <a:endParaRPr lang="en-US"/>
           </a:p>
@@ -5546,7 +5546,7 @@
           <a:p>
             <a:fld id="{C764DE79-268F-4C1A-8933-263129D2AF90}" type="datetimeFigureOut">
               <a:rPr lang="en-US" smtClean="0"/>
-              <a:t>9/20/25</a:t>
+              <a:t>10/16/25</a:t>
             </a:fld>
             <a:endParaRPr lang="en-US"/>
           </a:p>
@@ -5918,7 +5918,7 @@
           <a:p>
             <a:fld id="{C764DE79-268F-4C1A-8933-263129D2AF90}" type="datetimeFigureOut">
               <a:rPr lang="en-US" smtClean="0"/>
-              <a:t>9/20/25</a:t>
+              <a:t>10/16/25</a:t>
             </a:fld>
             <a:endParaRPr lang="en-US"/>
           </a:p>
@@ -6218,7 +6218,7 @@
           <a:p>
             <a:fld id="{C764DE79-268F-4C1A-8933-263129D2AF90}" type="datetimeFigureOut">
               <a:rPr lang="en-US" smtClean="0"/>
-              <a:t>9/20/25</a:t>
+              <a:t>10/16/25</a:t>
             </a:fld>
             <a:endParaRPr lang="en-US"/>
           </a:p>
@@ -6765,7 +6765,7 @@
           <a:p>
             <a:fld id="{C764DE79-268F-4C1A-8933-263129D2AF90}" type="datetimeFigureOut">
               <a:rPr lang="en-US" smtClean="0"/>
-              <a:t>9/20/25</a:t>
+              <a:t>10/16/25</a:t>
             </a:fld>
             <a:endParaRPr lang="en-US"/>
           </a:p>
@@ -6971,7 +6971,7 @@
           <a:p>
             <a:fld id="{C764DE79-268F-4C1A-8933-263129D2AF90}" type="datetimeFigureOut">
               <a:rPr lang="en-US" smtClean="0"/>
-              <a:t>9/20/25</a:t>
+              <a:t>10/16/25</a:t>
             </a:fld>
             <a:endParaRPr lang="en-US"/>
           </a:p>
@@ -7183,7 +7183,7 @@
           <a:p>
             <a:fld id="{C764DE79-268F-4C1A-8933-263129D2AF90}" type="datetimeFigureOut">
               <a:rPr lang="en-US" smtClean="0"/>
-              <a:t>9/20/25</a:t>
+              <a:t>10/16/25</a:t>
             </a:fld>
             <a:endParaRPr lang="en-US"/>
           </a:p>
@@ -7460,7 +7460,7 @@
           <a:p>
             <a:fld id="{C764DE79-268F-4C1A-8933-263129D2AF90}" type="datetimeFigureOut">
               <a:rPr lang="en-US" smtClean="0"/>
-              <a:t>9/20/25</a:t>
+              <a:t>10/16/25</a:t>
             </a:fld>
             <a:endParaRPr lang="en-US"/>
           </a:p>
@@ -7718,7 +7718,7 @@
           <a:p>
             <a:fld id="{C764DE79-268F-4C1A-8933-263129D2AF90}" type="datetimeFigureOut">
               <a:rPr lang="en-US" smtClean="0"/>
-              <a:t>9/20/25</a:t>
+              <a:t>10/16/25</a:t>
             </a:fld>
             <a:endParaRPr lang="en-US"/>
           </a:p>
@@ -7937,7 +7937,7 @@
           <a:p>
             <a:fld id="{C764DE79-268F-4C1A-8933-263129D2AF90}" type="datetimeFigureOut">
               <a:rPr lang="en-US" smtClean="0"/>
-              <a:t>9/20/25</a:t>
+              <a:t>10/16/25</a:t>
             </a:fld>
             <a:endParaRPr lang="en-US"/>
           </a:p>
@@ -8413,14 +8413,14 @@
           </a:ln>
           <a:extLst>
             <a:ext uri="{909E8E84-426E-40dd-AFC4-6F175D3DCCD1}">
-              <a14:hiddenFill xmlns:a14="http://schemas.microsoft.com/office/drawing/2010/main" xmlns="">
+              <a14:hiddenFill xmlns="" xmlns:a14="http://schemas.microsoft.com/office/drawing/2010/main">
                 <a:solidFill>
                   <a:srgbClr val="FFFFFF"/>
                 </a:solidFill>
               </a14:hiddenFill>
             </a:ext>
             <a:ext uri="{91240B29-F687-4f45-9708-019B960494DF}">
-              <a14:hiddenLine xmlns:a14="http://schemas.microsoft.com/office/drawing/2010/main" xmlns="" w="9525">
+              <a14:hiddenLine xmlns="" xmlns:a14="http://schemas.microsoft.com/office/drawing/2010/main" w="9525">
                 <a:solidFill>
                   <a:srgbClr val="000000"/>
                 </a:solidFill>
@@ -8857,42 +8857,6 @@
           </a:p>
         </p:txBody>
       </p:sp>
-      <p:pic>
-        <p:nvPicPr>
-          <p:cNvPr id="4" name="Picture 3" descr="Text&#10;&#10;Description automatically generated">
-            <a:extLst>
-              <a:ext uri="{FF2B5EF4-FFF2-40B4-BE49-F238E27FC236}">
-                <a16:creationId xmlns:a16="http://schemas.microsoft.com/office/drawing/2014/main" id="{3C52B6A4-97C1-5BF3-8F44-19C73FB40166}"/>
-              </a:ext>
-            </a:extLst>
-          </p:cNvPr>
-          <p:cNvPicPr>
-            <a:picLocks noChangeAspect="1"/>
-          </p:cNvPicPr>
-          <p:nvPr/>
-        </p:nvPicPr>
-        <p:blipFill>
-          <a:blip r:embed="rId3" cstate="print">
-            <a:extLst>
-              <a:ext uri="{28A0092B-C50C-407E-A947-70E740481C1C}">
-                <a14:useLocalDpi xmlns:a14="http://schemas.microsoft.com/office/drawing/2010/main" val="0"/>
-              </a:ext>
-            </a:extLst>
-          </a:blip>
-          <a:stretch>
-            <a:fillRect/>
-          </a:stretch>
-        </p:blipFill>
-        <p:spPr>
-          <a:xfrm>
-            <a:off x="651641" y="5501441"/>
-            <a:ext cx="2286000" cy="1281546"/>
-          </a:xfrm>
-          <a:prstGeom prst="rect">
-            <a:avLst/>
-          </a:prstGeom>
-        </p:spPr>
-      </p:pic>
       <p:sp>
         <p:nvSpPr>
           <p:cNvPr id="5" name="TextBox 4">
@@ -8963,7 +8927,7 @@
           <p:nvPr/>
         </p:nvPicPr>
         <p:blipFill>
-          <a:blip r:embed="rId4">
+          <a:blip r:embed="rId3">
             <a:extLst>
               <a:ext uri="{28A0092B-C50C-407E-A947-70E740481C1C}">
                 <a14:useLocalDpi xmlns:a14="http://schemas.microsoft.com/office/drawing/2010/main" val="0"/>
@@ -8993,6 +8957,42 @@
               </a14:hiddenFill>
             </a:ext>
           </a:extLst>
+        </p:spPr>
+      </p:pic>
+      <p:pic>
+        <p:nvPicPr>
+          <p:cNvPr id="7" name="Picture 6">
+            <a:extLst>
+              <a:ext uri="{FF2B5EF4-FFF2-40B4-BE49-F238E27FC236}">
+                <a16:creationId xmlns:a16="http://schemas.microsoft.com/office/drawing/2014/main" id="{70224E30-BD90-6D07-3E1E-E5344C170162}"/>
+              </a:ext>
+            </a:extLst>
+          </p:cNvPr>
+          <p:cNvPicPr>
+            <a:picLocks noChangeAspect="1"/>
+          </p:cNvPicPr>
+          <p:nvPr/>
+        </p:nvPicPr>
+        <p:blipFill>
+          <a:blip r:embed="rId4" cstate="print">
+            <a:extLst>
+              <a:ext uri="{28A0092B-C50C-407E-A947-70E740481C1C}">
+                <a14:useLocalDpi xmlns:a14="http://schemas.microsoft.com/office/drawing/2010/main" val="0"/>
+              </a:ext>
+            </a:extLst>
+          </a:blip>
+          <a:stretch>
+            <a:fillRect/>
+          </a:stretch>
+        </p:blipFill>
+        <p:spPr>
+          <a:xfrm>
+            <a:off x="499242" y="5565517"/>
+            <a:ext cx="2057400" cy="1153391"/>
+          </a:xfrm>
+          <a:prstGeom prst="rect">
+            <a:avLst/>
+          </a:prstGeom>
         </p:spPr>
       </p:pic>
     </p:spTree>
@@ -9070,14 +9070,14 @@
           </a:ln>
           <a:extLst>
             <a:ext uri="{909E8E84-426E-40dd-AFC4-6F175D3DCCD1}">
-              <a14:hiddenFill xmlns:a14="http://schemas.microsoft.com/office/drawing/2010/main" xmlns="">
+              <a14:hiddenFill xmlns="" xmlns:a14="http://schemas.microsoft.com/office/drawing/2010/main">
                 <a:solidFill>
                   <a:srgbClr val="FFFFFF"/>
                 </a:solidFill>
               </a14:hiddenFill>
             </a:ext>
             <a:ext uri="{91240B29-F687-4f45-9708-019B960494DF}">
-              <a14:hiddenLine xmlns:a14="http://schemas.microsoft.com/office/drawing/2010/main" xmlns="" w="9525">
+              <a14:hiddenLine xmlns="" xmlns:a14="http://schemas.microsoft.com/office/drawing/2010/main" w="9525">
                 <a:solidFill>
                   <a:srgbClr val="000000"/>
                 </a:solidFill>
@@ -11142,14 +11142,14 @@
           </a:ln>
           <a:extLst>
             <a:ext uri="{909E8E84-426E-40dd-AFC4-6F175D3DCCD1}">
-              <a14:hiddenFill xmlns:a14="http://schemas.microsoft.com/office/drawing/2010/main" xmlns="">
+              <a14:hiddenFill xmlns="" xmlns:a14="http://schemas.microsoft.com/office/drawing/2010/main">
                 <a:solidFill>
                   <a:srgbClr val="FFFFFF"/>
                 </a:solidFill>
               </a14:hiddenFill>
             </a:ext>
             <a:ext uri="{91240B29-F687-4f45-9708-019B960494DF}">
-              <a14:hiddenLine xmlns:a14="http://schemas.microsoft.com/office/drawing/2010/main" xmlns="" w="9525">
+              <a14:hiddenLine xmlns="" xmlns:a14="http://schemas.microsoft.com/office/drawing/2010/main" w="9525">
                 <a:solidFill>
                   <a:srgbClr val="000000"/>
                 </a:solidFill>
@@ -15434,14 +15434,14 @@
           </a:ln>
           <a:extLst>
             <a:ext uri="{909E8E84-426E-40dd-AFC4-6F175D3DCCD1}">
-              <a14:hiddenFill xmlns:a14="http://schemas.microsoft.com/office/drawing/2010/main" xmlns="">
+              <a14:hiddenFill xmlns="" xmlns:a14="http://schemas.microsoft.com/office/drawing/2010/main">
                 <a:solidFill>
                   <a:srgbClr val="FFFFFF"/>
                 </a:solidFill>
               </a14:hiddenFill>
             </a:ext>
             <a:ext uri="{91240B29-F687-4f45-9708-019B960494DF}">
-              <a14:hiddenLine xmlns:a14="http://schemas.microsoft.com/office/drawing/2010/main" xmlns="" w="9525">
+              <a14:hiddenLine xmlns="" xmlns:a14="http://schemas.microsoft.com/office/drawing/2010/main" w="9525">
                 <a:solidFill>
                   <a:srgbClr val="000000"/>
                 </a:solidFill>
